--- a/DQMS-Voice-Fill-Prototype.pptx
+++ b/DQMS-Voice-Fill-Prototype.pptx
@@ -17,9 +17,10 @@
     <p:sldId id="265" r:id="rId11"/>
     <p:sldId id="266" r:id="rId12"/>
     <p:sldId id="267" r:id="rId13"/>
+    <p:sldId id="268" r:id="rId14"/>
   </p:sldIdLst>
   <p:notesMasterIdLst>
-    <p:notesMasterId r:id="rId14"/>
+    <p:notesMasterId r:id="rId15"/>
   </p:notesMasterIdLst>
   <p:sldSz cx="12192000" cy="6858000"/>
   <p:notesSz cx="6858000" cy="12192000"/>
@@ -801,6 +802,94 @@
             <a:fld id="{F7021451-1387-4CA6-816F-3879F97B5CBC}" type="slidenum">
               <a:rPr lang="en-US"/>
               <a:t>12</a:t>
+            </a:fld>
+            <a:endParaRPr lang="en-US"/>
+          </a:p>
+        </p:txBody>
+      </p:sp>
+    </p:spTree>
+    <p:extLst>
+      <p:ext uri="{BB962C8B-B14F-4D97-AF65-F5344CB8AC3E}">
+        <p14:creationId xmlns:p14="http://schemas.microsoft.com/office/powerpoint/2010/main" val="1024086991"/>
+      </p:ext>
+    </p:extLst>
+  </p:cSld>
+  <p:clrMapOvr>
+    <a:masterClrMapping/>
+  </p:clrMapOvr>
+</p:notes>
+</file>
+
+<file path=ppt/notesSlides/notesSlide13.xml><?xml version="1.0" encoding="utf-8"?>
+<p:notes xmlns:a="http://schemas.openxmlformats.org/drawingml/2006/main" xmlns:r="http://schemas.openxmlformats.org/officeDocument/2006/relationships" xmlns:p="http://schemas.openxmlformats.org/presentationml/2006/main">
+  <p:cSld>
+    <p:spTree>
+      <p:nvGrpSpPr>
+        <p:cNvPr id="1" name=""/>
+        <p:cNvGrpSpPr/>
+        <p:nvPr/>
+      </p:nvGrpSpPr>
+      <p:grpSpPr>
+        <a:xfrm>
+          <a:off x="0" y="0"/>
+          <a:ext cx="0" cy="0"/>
+          <a:chOff x="0" y="0"/>
+          <a:chExt cx="0" cy="0"/>
+        </a:xfrm>
+      </p:grpSpPr>
+      <p:sp>
+        <p:nvSpPr>
+          <p:cNvPr id="2" name="Slide Image Placeholder 1"/>
+          <p:cNvSpPr>
+            <a:spLocks noGrp="1" noRot="1" noChangeAspect="1"/>
+          </p:cNvSpPr>
+          <p:nvPr>
+            <p:ph type="sldImg"/>
+          </p:nvPr>
+        </p:nvSpPr>
+        <p:spPr/>
+      </p:sp>
+      <p:sp>
+        <p:nvSpPr>
+          <p:cNvPr id="3" name="Notes Placeholder 2"/>
+          <p:cNvSpPr>
+            <a:spLocks noGrp="1"/>
+          </p:cNvSpPr>
+          <p:nvPr>
+            <p:ph type="body" idx="1"/>
+          </p:nvPr>
+        </p:nvSpPr>
+        <p:spPr/>
+        <p:txBody>
+          <a:bodyPr/>
+          <a:lstStyle/>
+          <a:p>
+            <a:r>
+              <a:rPr lang="en-US" dirty="0"/>
+              <a:t/>
+            </a:r>
+            <a:endParaRPr lang="en-US" dirty="0"/>
+          </a:p>
+        </p:txBody>
+      </p:sp>
+      <p:sp>
+        <p:nvSpPr>
+          <p:cNvPr id="4" name="Slide Number Placeholder 3"/>
+          <p:cNvSpPr>
+            <a:spLocks noGrp="1"/>
+          </p:cNvSpPr>
+          <p:nvPr>
+            <p:ph type="sldNum" sz="quarter" idx="10"/>
+          </p:nvPr>
+        </p:nvSpPr>
+        <p:spPr/>
+        <p:txBody>
+          <a:bodyPr/>
+          <a:lstStyle/>
+          <a:p>
+            <a:fld id="{F7021451-1387-4CA6-816F-3879F97B5CBC}" type="slidenum">
+              <a:rPr lang="en-US"/>
+              <a:t>13</a:t>
             </a:fld>
             <a:endParaRPr lang="en-US"/>
           </a:p>
@@ -2098,6 +2187,66 @@
               <a:t>October 2026</a:t>
             </a:r>
             <a:endParaRPr lang="en-US" sz="1400" dirty="0"/>
+          </a:p>
+        </p:txBody>
+      </p:sp>
+      <p:sp>
+        <p:nvSpPr>
+          <p:cNvPr id="9" name="Text 7"/>
+          <p:cNvSpPr/>
+          <p:nvPr/>
+        </p:nvSpPr>
+        <p:spPr>
+          <a:xfrm>
+            <a:off x="822960" y="3977640"/>
+            <a:ext cx="10058400" cy="457200"/>
+          </a:xfrm>
+          <a:prstGeom prst="rect">
+            <a:avLst/>
+          </a:prstGeom>
+          <a:noFill/>
+          <a:ln/>
+        </p:spPr>
+        <p:txBody>
+          <a:bodyPr wrap="square" rtlCol="0" anchor="ctr"/>
+          <a:lstStyle/>
+          <a:p>
+            <a:pPr indent="0" marL="0">
+              <a:buNone/>
+            </a:pPr>
+            <a:r>
+              <a:rPr lang="en-US" sz="1800" dirty="0">
+                <a:solidFill>
+                  <a:srgbClr val="C9C9CF"/>
+                </a:solidFill>
+                <a:latin typeface="Calibri" pitchFamily="34" charset="0"/>
+                <a:ea typeface="Calibri" pitchFamily="34" charset="-122"/>
+                <a:cs typeface="Calibri" pitchFamily="34" charset="-120"/>
+              </a:rPr>
+              <a:t>Try it: </a:t>
+            </a:r>
+            <a:pPr indent="0" marL="0">
+              <a:buNone/>
+            </a:pPr>
+            <a:r>
+              <a:rPr lang="en-US" sz="1800" b="1" u="sng" dirty="0">
+                <a:solidFill>
+                  <a:srgbClr val="FFFFFF"/>
+                </a:solidFill>
+                <a:latin typeface="Calibri" pitchFamily="34" charset="0"/>
+                <a:ea typeface="Calibri" pitchFamily="34" charset="-122"/>
+                <a:cs typeface="Calibri" pitchFamily="34" charset="-120"/>
+                <a:hlinkClick r:id="rId1" invalidUrl="" action="" tgtFrame="" tooltip="Open the live prototype" history="1" highlightClick="0" endSnd="0">
+                  <a:extLst>
+                    <a:ext uri="{A12FA001-AC4F-418D-AE19-62706E023703}">
+                      <ahyp:hlinkClr xmlns:ahyp="http://schemas.microsoft.com/office/drawing/2018/hyperlinkcolor" val="tx"/>
+                    </a:ext>
+                  </a:extLst>
+                </a:hlinkClick>
+              </a:rPr>
+              <a:t>protoype-b7i8ckokl-avnish12.vercel.app</a:t>
+            </a:r>
+            <a:endParaRPr lang="en-US" sz="1800" dirty="0"/>
           </a:p>
         </p:txBody>
       </p:sp>
@@ -5436,6 +5585,1009 @@
 </p:sld>
 </file>
 
+<file path=ppt/slides/slide13.xml><?xml version="1.0" encoding="utf-8"?>
+<p:sld xmlns:a="http://schemas.openxmlformats.org/drawingml/2006/main" xmlns:r="http://schemas.openxmlformats.org/officeDocument/2006/relationships" xmlns:p="http://schemas.openxmlformats.org/presentationml/2006/main">
+  <p:cSld name="Slide 13">
+    <p:bg>
+      <p:bgPr>
+        <a:solidFill>
+          <a:srgbClr val="FFFFFF"/>
+        </a:solidFill>
+      </p:bgPr>
+    </p:bg>
+    <p:spTree>
+      <p:nvGrpSpPr>
+        <p:cNvPr id="1" name=""/>
+        <p:cNvGrpSpPr/>
+        <p:nvPr/>
+      </p:nvGrpSpPr>
+      <p:grpSpPr>
+        <a:xfrm>
+          <a:off x="0" y="0"/>
+          <a:ext cx="0" cy="0"/>
+          <a:chOff x="0" y="0"/>
+          <a:chExt cx="0" cy="0"/>
+        </a:xfrm>
+      </p:grpSpPr>
+      <p:sp>
+        <p:nvSpPr>
+          <p:cNvPr id="2" name="Shape 0"/>
+          <p:cNvSpPr/>
+          <p:nvPr/>
+        </p:nvSpPr>
+        <p:spPr>
+          <a:xfrm>
+            <a:off x="0" y="0"/>
+            <a:ext cx="109728" cy="6858000"/>
+          </a:xfrm>
+          <a:prstGeom prst="rect">
+            <a:avLst/>
+          </a:prstGeom>
+          <a:solidFill>
+            <a:srgbClr val="E0362C"/>
+          </a:solidFill>
+          <a:ln w="12700">
+            <a:solidFill>
+              <a:srgbClr val="E0362C"/>
+            </a:solidFill>
+            <a:prstDash val="solid"/>
+          </a:ln>
+        </p:spPr>
+      </p:sp>
+      <p:sp>
+        <p:nvSpPr>
+          <p:cNvPr id="3" name="Text 1"/>
+          <p:cNvSpPr/>
+          <p:nvPr/>
+        </p:nvSpPr>
+        <p:spPr>
+          <a:xfrm>
+            <a:off x="548640" y="320040"/>
+            <a:ext cx="9144000" cy="274320"/>
+          </a:xfrm>
+          <a:prstGeom prst="rect">
+            <a:avLst/>
+          </a:prstGeom>
+          <a:noFill/>
+          <a:ln/>
+        </p:spPr>
+        <p:txBody>
+          <a:bodyPr wrap="square" rtlCol="0" anchor="ctr"/>
+          <a:lstStyle/>
+          <a:p>
+            <a:pPr indent="0" marL="0">
+              <a:buNone/>
+            </a:pPr>
+            <a:r>
+              <a:rPr lang="en-US" sz="1100" b="1" spc="200" kern="0" dirty="0">
+                <a:solidFill>
+                  <a:srgbClr val="E0362C"/>
+                </a:solidFill>
+                <a:latin typeface="Calibri" pitchFamily="34" charset="0"/>
+                <a:ea typeface="Calibri" pitchFamily="34" charset="-122"/>
+                <a:cs typeface="Calibri" pitchFamily="34" charset="-120"/>
+              </a:rPr>
+              <a:t>LIVE DEMO</a:t>
+            </a:r>
+            <a:endParaRPr lang="en-US" sz="1100" dirty="0"/>
+          </a:p>
+        </p:txBody>
+      </p:sp>
+      <p:sp>
+        <p:nvSpPr>
+          <p:cNvPr id="4" name="Text 2"/>
+          <p:cNvSpPr/>
+          <p:nvPr/>
+        </p:nvSpPr>
+        <p:spPr>
+          <a:xfrm>
+            <a:off x="548640" y="566928"/>
+            <a:ext cx="11064240" cy="685800"/>
+          </a:xfrm>
+          <a:prstGeom prst="rect">
+            <a:avLst/>
+          </a:prstGeom>
+          <a:noFill/>
+          <a:ln/>
+        </p:spPr>
+        <p:txBody>
+          <a:bodyPr wrap="square" rtlCol="0" anchor="ctr"/>
+          <a:lstStyle/>
+          <a:p>
+            <a:pPr indent="0" marL="0">
+              <a:buNone/>
+            </a:pPr>
+            <a:r>
+              <a:rPr lang="en-US" sz="2800" b="1" dirty="0">
+                <a:solidFill>
+                  <a:srgbClr val="1A1A1A"/>
+                </a:solidFill>
+                <a:latin typeface="Calibri" pitchFamily="34" charset="0"/>
+                <a:ea typeface="Calibri" pitchFamily="34" charset="-122"/>
+                <a:cs typeface="Calibri" pitchFamily="34" charset="-120"/>
+              </a:rPr>
+              <a:t>Try the prototype yourself</a:t>
+            </a:r>
+            <a:endParaRPr lang="en-US" sz="2800" dirty="0"/>
+          </a:p>
+        </p:txBody>
+      </p:sp>
+      <p:sp>
+        <p:nvSpPr>
+          <p:cNvPr id="5" name="Text 3"/>
+          <p:cNvSpPr/>
+          <p:nvPr/>
+        </p:nvSpPr>
+        <p:spPr>
+          <a:xfrm>
+            <a:off x="8503920" y="6446520"/>
+            <a:ext cx="3383280" cy="274320"/>
+          </a:xfrm>
+          <a:prstGeom prst="rect">
+            <a:avLst/>
+          </a:prstGeom>
+          <a:noFill/>
+          <a:ln/>
+        </p:spPr>
+        <p:txBody>
+          <a:bodyPr wrap="square" rtlCol="0" anchor="ctr"/>
+          <a:lstStyle/>
+          <a:p>
+            <a:pPr algn="r" indent="0" marL="0">
+              <a:buNone/>
+            </a:pPr>
+            <a:r>
+              <a:rPr lang="en-US" sz="900" dirty="0">
+                <a:solidFill>
+                  <a:srgbClr val="6B6B70"/>
+                </a:solidFill>
+                <a:latin typeface="Calibri" pitchFamily="34" charset="0"/>
+                <a:ea typeface="Calibri" pitchFamily="34" charset="-122"/>
+                <a:cs typeface="Calibri" pitchFamily="34" charset="-120"/>
+              </a:rPr>
+              <a:t>DQMS Voice Fill · Prototype   13</a:t>
+            </a:r>
+            <a:endParaRPr lang="en-US" sz="900" dirty="0"/>
+          </a:p>
+        </p:txBody>
+      </p:sp>
+      <p:sp>
+        <p:nvSpPr>
+          <p:cNvPr id="6" name="Shape 4"/>
+          <p:cNvSpPr/>
+          <p:nvPr/>
+        </p:nvSpPr>
+        <p:spPr>
+          <a:xfrm>
+            <a:off x="548640" y="1508760"/>
+            <a:ext cx="11064240" cy="1234440"/>
+          </a:xfrm>
+          <a:prstGeom prst="roundRect">
+            <a:avLst>
+              <a:gd name="adj" fmla="val 10370"/>
+            </a:avLst>
+          </a:prstGeom>
+          <a:solidFill>
+            <a:srgbClr val="161618"/>
+          </a:solidFill>
+          <a:ln w="12700">
+            <a:solidFill>
+              <a:srgbClr val="161618"/>
+            </a:solidFill>
+            <a:prstDash val="solid"/>
+          </a:ln>
+        </p:spPr>
+      </p:sp>
+      <p:sp>
+        <p:nvSpPr>
+          <p:cNvPr id="7" name="Text 5"/>
+          <p:cNvSpPr/>
+          <p:nvPr/>
+        </p:nvSpPr>
+        <p:spPr>
+          <a:xfrm>
+            <a:off x="868680" y="1600200"/>
+            <a:ext cx="10424160" cy="365760"/>
+          </a:xfrm>
+          <a:prstGeom prst="rect">
+            <a:avLst/>
+          </a:prstGeom>
+          <a:noFill/>
+          <a:ln/>
+        </p:spPr>
+        <p:txBody>
+          <a:bodyPr wrap="square" rtlCol="0" anchor="ctr"/>
+          <a:lstStyle/>
+          <a:p>
+            <a:pPr indent="0" marL="0">
+              <a:buNone/>
+            </a:pPr>
+            <a:r>
+              <a:rPr lang="en-US" sz="1400" dirty="0">
+                <a:solidFill>
+                  <a:srgbClr val="B9B9BF"/>
+                </a:solidFill>
+                <a:latin typeface="Calibri" pitchFamily="34" charset="0"/>
+                <a:ea typeface="Calibri" pitchFamily="34" charset="-122"/>
+                <a:cs typeface="Calibri" pitchFamily="34" charset="-120"/>
+              </a:rPr>
+              <a:t>Open in Chrome or Edge, on a laptop, tablet or phone</a:t>
+            </a:r>
+            <a:endParaRPr lang="en-US" sz="1400" dirty="0"/>
+          </a:p>
+        </p:txBody>
+      </p:sp>
+      <p:sp>
+        <p:nvSpPr>
+          <p:cNvPr id="8" name="Text 6">
+            <a:hlinkClick r:id="rId1" tooltip="Open the live prototype"/>
+          </p:cNvPr>
+          <p:cNvSpPr/>
+          <p:nvPr/>
+        </p:nvSpPr>
+        <p:spPr>
+          <a:xfrm>
+            <a:off x="868680" y="1965960"/>
+            <a:ext cx="10424160" cy="640080"/>
+          </a:xfrm>
+          <a:prstGeom prst="rect">
+            <a:avLst/>
+          </a:prstGeom>
+          <a:noFill/>
+          <a:ln/>
+        </p:spPr>
+        <p:txBody>
+          <a:bodyPr wrap="square" rtlCol="0" anchor="ctr"/>
+          <a:lstStyle/>
+          <a:p>
+            <a:pPr indent="0" marL="0">
+              <a:buNone/>
+            </a:pPr>
+            <a:r>
+              <a:rPr lang="en-US" sz="3000" b="1" u="sng" dirty="0">
+                <a:solidFill>
+                  <a:srgbClr val="FFFFFF"/>
+                </a:solidFill>
+                <a:latin typeface="Calibri" pitchFamily="34" charset="0"/>
+                <a:ea typeface="Calibri" pitchFamily="34" charset="-122"/>
+                <a:cs typeface="Calibri" pitchFamily="34" charset="-120"/>
+                <a:hlinkClick r:id="rId1" invalidUrl="" action="" tgtFrame="" tooltip="Open the live prototype" history="1" highlightClick="0" endSnd="0">
+                  <a:extLst>
+                    <a:ext uri="{A12FA001-AC4F-418D-AE19-62706E023703}">
+                      <ahyp:hlinkClr xmlns:ahyp="http://schemas.microsoft.com/office/drawing/2018/hyperlinkcolor" val="tx"/>
+                    </a:ext>
+                  </a:extLst>
+                </a:hlinkClick>
+              </a:rPr>
+              <a:t>https://protoype-b7i8ckokl-avnish12.vercel.app</a:t>
+            </a:r>
+            <a:endParaRPr lang="en-US" sz="3000" dirty="0"/>
+          </a:p>
+        </p:txBody>
+      </p:sp>
+      <p:sp>
+        <p:nvSpPr>
+          <p:cNvPr id="9" name="Shape 7"/>
+          <p:cNvSpPr/>
+          <p:nvPr/>
+        </p:nvSpPr>
+        <p:spPr>
+          <a:xfrm>
+            <a:off x="548640" y="3063240"/>
+            <a:ext cx="2651760" cy="2514600"/>
+          </a:xfrm>
+          <a:prstGeom prst="roundRect">
+            <a:avLst>
+              <a:gd name="adj" fmla="val 4364"/>
+            </a:avLst>
+          </a:prstGeom>
+          <a:solidFill>
+            <a:srgbClr val="F7F7F8"/>
+          </a:solidFill>
+          <a:ln w="12700">
+            <a:solidFill>
+              <a:srgbClr val="E6E6E9"/>
+            </a:solidFill>
+            <a:prstDash val="solid"/>
+          </a:ln>
+        </p:spPr>
+      </p:sp>
+      <p:sp>
+        <p:nvSpPr>
+          <p:cNvPr id="10" name="Shape 8"/>
+          <p:cNvSpPr/>
+          <p:nvPr/>
+        </p:nvSpPr>
+        <p:spPr>
+          <a:xfrm>
+            <a:off x="777240" y="3291840"/>
+            <a:ext cx="384048" cy="384048"/>
+          </a:xfrm>
+          <a:prstGeom prst="ellipse">
+            <a:avLst/>
+          </a:prstGeom>
+          <a:solidFill>
+            <a:srgbClr val="5B4BC4"/>
+          </a:solidFill>
+          <a:ln w="12700">
+            <a:solidFill>
+              <a:srgbClr val="5B4BC4"/>
+            </a:solidFill>
+            <a:prstDash val="solid"/>
+          </a:ln>
+        </p:spPr>
+      </p:sp>
+      <p:sp>
+        <p:nvSpPr>
+          <p:cNvPr id="11" name="Text 9"/>
+          <p:cNvSpPr/>
+          <p:nvPr/>
+        </p:nvSpPr>
+        <p:spPr>
+          <a:xfrm>
+            <a:off x="777240" y="3291840"/>
+            <a:ext cx="384048" cy="384048"/>
+          </a:xfrm>
+          <a:prstGeom prst="rect">
+            <a:avLst/>
+          </a:prstGeom>
+          <a:noFill/>
+          <a:ln/>
+        </p:spPr>
+        <p:txBody>
+          <a:bodyPr wrap="square" rtlCol="0" anchor="ctr"/>
+          <a:lstStyle/>
+          <a:p>
+            <a:pPr algn="ctr" indent="0" marL="0">
+              <a:buNone/>
+            </a:pPr>
+            <a:r>
+              <a:rPr lang="en-US" sz="1400" b="1" dirty="0">
+                <a:solidFill>
+                  <a:srgbClr val="FFFFFF"/>
+                </a:solidFill>
+                <a:latin typeface="Calibri" pitchFamily="34" charset="0"/>
+                <a:ea typeface="Calibri" pitchFamily="34" charset="-122"/>
+                <a:cs typeface="Calibri" pitchFamily="34" charset="-120"/>
+              </a:rPr>
+              <a:t>1</a:t>
+            </a:r>
+            <a:endParaRPr lang="en-US" sz="1400" dirty="0"/>
+          </a:p>
+        </p:txBody>
+      </p:sp>
+      <p:sp>
+        <p:nvSpPr>
+          <p:cNvPr id="12" name="Text 10"/>
+          <p:cNvSpPr/>
+          <p:nvPr/>
+        </p:nvSpPr>
+        <p:spPr>
+          <a:xfrm>
+            <a:off x="777240" y="3794760"/>
+            <a:ext cx="2194560" cy="365760"/>
+          </a:xfrm>
+          <a:prstGeom prst="rect">
+            <a:avLst/>
+          </a:prstGeom>
+          <a:noFill/>
+          <a:ln/>
+        </p:spPr>
+        <p:txBody>
+          <a:bodyPr wrap="square" rtlCol="0" anchor="t"/>
+          <a:lstStyle/>
+          <a:p>
+            <a:pPr indent="0" marL="0">
+              <a:buNone/>
+            </a:pPr>
+            <a:r>
+              <a:rPr lang="en-US" sz="1700" b="1" dirty="0">
+                <a:solidFill>
+                  <a:srgbClr val="1A1A1A"/>
+                </a:solidFill>
+                <a:latin typeface="Calibri" pitchFamily="34" charset="0"/>
+                <a:ea typeface="Calibri" pitchFamily="34" charset="-122"/>
+                <a:cs typeface="Calibri" pitchFamily="34" charset="-120"/>
+              </a:rPr>
+              <a:t>Open the link</a:t>
+            </a:r>
+            <a:endParaRPr lang="en-US" sz="1700" dirty="0"/>
+          </a:p>
+        </p:txBody>
+      </p:sp>
+      <p:sp>
+        <p:nvSpPr>
+          <p:cNvPr id="13" name="Text 11"/>
+          <p:cNvSpPr/>
+          <p:nvPr/>
+        </p:nvSpPr>
+        <p:spPr>
+          <a:xfrm>
+            <a:off x="777240" y="4206240"/>
+            <a:ext cx="2194560" cy="1234440"/>
+          </a:xfrm>
+          <a:prstGeom prst="rect">
+            <a:avLst/>
+          </a:prstGeom>
+          <a:noFill/>
+          <a:ln/>
+        </p:spPr>
+        <p:txBody>
+          <a:bodyPr wrap="square" rtlCol="0" anchor="t"/>
+          <a:lstStyle/>
+          <a:p>
+            <a:pPr indent="0" marL="0">
+              <a:buNone/>
+            </a:pPr>
+            <a:r>
+              <a:rPr lang="en-US" sz="1300" dirty="0">
+                <a:solidFill>
+                  <a:srgbClr val="6B6B70"/>
+                </a:solidFill>
+                <a:latin typeface="Calibri" pitchFamily="34" charset="0"/>
+                <a:ea typeface="Calibri" pitchFamily="34" charset="-122"/>
+                <a:cs typeface="Calibri" pitchFamily="34" charset="-120"/>
+              </a:rPr>
+              <a:t>Allow the microphone when the browser asks.</a:t>
+            </a:r>
+            <a:endParaRPr lang="en-US" sz="1300" dirty="0"/>
+          </a:p>
+        </p:txBody>
+      </p:sp>
+      <p:sp>
+        <p:nvSpPr>
+          <p:cNvPr id="14" name="Shape 12"/>
+          <p:cNvSpPr/>
+          <p:nvPr/>
+        </p:nvSpPr>
+        <p:spPr>
+          <a:xfrm>
+            <a:off x="3355848" y="3063240"/>
+            <a:ext cx="2651760" cy="2514600"/>
+          </a:xfrm>
+          <a:prstGeom prst="roundRect">
+            <a:avLst>
+              <a:gd name="adj" fmla="val 4364"/>
+            </a:avLst>
+          </a:prstGeom>
+          <a:solidFill>
+            <a:srgbClr val="F7F7F8"/>
+          </a:solidFill>
+          <a:ln w="12700">
+            <a:solidFill>
+              <a:srgbClr val="E6E6E9"/>
+            </a:solidFill>
+            <a:prstDash val="solid"/>
+          </a:ln>
+        </p:spPr>
+      </p:sp>
+      <p:sp>
+        <p:nvSpPr>
+          <p:cNvPr id="15" name="Shape 13"/>
+          <p:cNvSpPr/>
+          <p:nvPr/>
+        </p:nvSpPr>
+        <p:spPr>
+          <a:xfrm>
+            <a:off x="3584448" y="3291840"/>
+            <a:ext cx="384048" cy="384048"/>
+          </a:xfrm>
+          <a:prstGeom prst="ellipse">
+            <a:avLst/>
+          </a:prstGeom>
+          <a:solidFill>
+            <a:srgbClr val="5B4BC4"/>
+          </a:solidFill>
+          <a:ln w="12700">
+            <a:solidFill>
+              <a:srgbClr val="5B4BC4"/>
+            </a:solidFill>
+            <a:prstDash val="solid"/>
+          </a:ln>
+        </p:spPr>
+      </p:sp>
+      <p:sp>
+        <p:nvSpPr>
+          <p:cNvPr id="16" name="Text 14"/>
+          <p:cNvSpPr/>
+          <p:nvPr/>
+        </p:nvSpPr>
+        <p:spPr>
+          <a:xfrm>
+            <a:off x="3584448" y="3291840"/>
+            <a:ext cx="384048" cy="384048"/>
+          </a:xfrm>
+          <a:prstGeom prst="rect">
+            <a:avLst/>
+          </a:prstGeom>
+          <a:noFill/>
+          <a:ln/>
+        </p:spPr>
+        <p:txBody>
+          <a:bodyPr wrap="square" rtlCol="0" anchor="ctr"/>
+          <a:lstStyle/>
+          <a:p>
+            <a:pPr algn="ctr" indent="0" marL="0">
+              <a:buNone/>
+            </a:pPr>
+            <a:r>
+              <a:rPr lang="en-US" sz="1400" b="1" dirty="0">
+                <a:solidFill>
+                  <a:srgbClr val="FFFFFF"/>
+                </a:solidFill>
+                <a:latin typeface="Calibri" pitchFamily="34" charset="0"/>
+                <a:ea typeface="Calibri" pitchFamily="34" charset="-122"/>
+                <a:cs typeface="Calibri" pitchFamily="34" charset="-120"/>
+              </a:rPr>
+              <a:t>2</a:t>
+            </a:r>
+            <a:endParaRPr lang="en-US" sz="1400" dirty="0"/>
+          </a:p>
+        </p:txBody>
+      </p:sp>
+      <p:sp>
+        <p:nvSpPr>
+          <p:cNvPr id="17" name="Text 15"/>
+          <p:cNvSpPr/>
+          <p:nvPr/>
+        </p:nvSpPr>
+        <p:spPr>
+          <a:xfrm>
+            <a:off x="3584448" y="3794760"/>
+            <a:ext cx="2194560" cy="365760"/>
+          </a:xfrm>
+          <a:prstGeom prst="rect">
+            <a:avLst/>
+          </a:prstGeom>
+          <a:noFill/>
+          <a:ln/>
+        </p:spPr>
+        <p:txBody>
+          <a:bodyPr wrap="square" rtlCol="0" anchor="t"/>
+          <a:lstStyle/>
+          <a:p>
+            <a:pPr indent="0" marL="0">
+              <a:buNone/>
+            </a:pPr>
+            <a:r>
+              <a:rPr lang="en-US" sz="1700" b="1" dirty="0">
+                <a:solidFill>
+                  <a:srgbClr val="1A1A1A"/>
+                </a:solidFill>
+                <a:latin typeface="Calibri" pitchFamily="34" charset="0"/>
+                <a:ea typeface="Calibri" pitchFamily="34" charset="-122"/>
+                <a:cs typeface="Calibri" pitchFamily="34" charset="-120"/>
+              </a:rPr>
+              <a:t>Enter the code</a:t>
+            </a:r>
+            <a:endParaRPr lang="en-US" sz="1700" dirty="0"/>
+          </a:p>
+        </p:txBody>
+      </p:sp>
+      <p:sp>
+        <p:nvSpPr>
+          <p:cNvPr id="18" name="Text 16"/>
+          <p:cNvSpPr/>
+          <p:nvPr/>
+        </p:nvSpPr>
+        <p:spPr>
+          <a:xfrm>
+            <a:off x="3584448" y="4206240"/>
+            <a:ext cx="2194560" cy="1234440"/>
+          </a:xfrm>
+          <a:prstGeom prst="rect">
+            <a:avLst/>
+          </a:prstGeom>
+          <a:noFill/>
+          <a:ln/>
+        </p:spPr>
+        <p:txBody>
+          <a:bodyPr wrap="square" rtlCol="0" anchor="t"/>
+          <a:lstStyle/>
+          <a:p>
+            <a:pPr indent="0" marL="0">
+              <a:buNone/>
+            </a:pPr>
+            <a:r>
+              <a:rPr lang="en-US" sz="1300" dirty="0">
+                <a:solidFill>
+                  <a:srgbClr val="6B6B70"/>
+                </a:solidFill>
+                <a:latin typeface="Calibri" pitchFamily="34" charset="0"/>
+                <a:ea typeface="Calibri" pitchFamily="34" charset="-122"/>
+                <a:cs typeface="Calibri" pitchFamily="34" charset="-120"/>
+              </a:rPr>
+              <a:t>Asked once, the first time the AI is used. Ask the project team for it.</a:t>
+            </a:r>
+            <a:endParaRPr lang="en-US" sz="1300" dirty="0"/>
+          </a:p>
+        </p:txBody>
+      </p:sp>
+      <p:sp>
+        <p:nvSpPr>
+          <p:cNvPr id="19" name="Shape 17"/>
+          <p:cNvSpPr/>
+          <p:nvPr/>
+        </p:nvSpPr>
+        <p:spPr>
+          <a:xfrm>
+            <a:off x="6163056" y="3063240"/>
+            <a:ext cx="2651760" cy="2514600"/>
+          </a:xfrm>
+          <a:prstGeom prst="roundRect">
+            <a:avLst>
+              <a:gd name="adj" fmla="val 4364"/>
+            </a:avLst>
+          </a:prstGeom>
+          <a:solidFill>
+            <a:srgbClr val="F7F7F8"/>
+          </a:solidFill>
+          <a:ln w="12700">
+            <a:solidFill>
+              <a:srgbClr val="E6E6E9"/>
+            </a:solidFill>
+            <a:prstDash val="solid"/>
+          </a:ln>
+        </p:spPr>
+      </p:sp>
+      <p:sp>
+        <p:nvSpPr>
+          <p:cNvPr id="20" name="Shape 18"/>
+          <p:cNvSpPr/>
+          <p:nvPr/>
+        </p:nvSpPr>
+        <p:spPr>
+          <a:xfrm>
+            <a:off x="6391656" y="3291840"/>
+            <a:ext cx="384048" cy="384048"/>
+          </a:xfrm>
+          <a:prstGeom prst="ellipse">
+            <a:avLst/>
+          </a:prstGeom>
+          <a:solidFill>
+            <a:srgbClr val="5B4BC4"/>
+          </a:solidFill>
+          <a:ln w="12700">
+            <a:solidFill>
+              <a:srgbClr val="5B4BC4"/>
+            </a:solidFill>
+            <a:prstDash val="solid"/>
+          </a:ln>
+        </p:spPr>
+      </p:sp>
+      <p:sp>
+        <p:nvSpPr>
+          <p:cNvPr id="21" name="Text 19"/>
+          <p:cNvSpPr/>
+          <p:nvPr/>
+        </p:nvSpPr>
+        <p:spPr>
+          <a:xfrm>
+            <a:off x="6391656" y="3291840"/>
+            <a:ext cx="384048" cy="384048"/>
+          </a:xfrm>
+          <a:prstGeom prst="rect">
+            <a:avLst/>
+          </a:prstGeom>
+          <a:noFill/>
+          <a:ln/>
+        </p:spPr>
+        <p:txBody>
+          <a:bodyPr wrap="square" rtlCol="0" anchor="ctr"/>
+          <a:lstStyle/>
+          <a:p>
+            <a:pPr algn="ctr" indent="0" marL="0">
+              <a:buNone/>
+            </a:pPr>
+            <a:r>
+              <a:rPr lang="en-US" sz="1400" b="1" dirty="0">
+                <a:solidFill>
+                  <a:srgbClr val="FFFFFF"/>
+                </a:solidFill>
+                <a:latin typeface="Calibri" pitchFamily="34" charset="0"/>
+                <a:ea typeface="Calibri" pitchFamily="34" charset="-122"/>
+                <a:cs typeface="Calibri" pitchFamily="34" charset="-120"/>
+              </a:rPr>
+              <a:t>3</a:t>
+            </a:r>
+            <a:endParaRPr lang="en-US" sz="1400" dirty="0"/>
+          </a:p>
+        </p:txBody>
+      </p:sp>
+      <p:sp>
+        <p:nvSpPr>
+          <p:cNvPr id="22" name="Text 20"/>
+          <p:cNvSpPr/>
+          <p:nvPr/>
+        </p:nvSpPr>
+        <p:spPr>
+          <a:xfrm>
+            <a:off x="6391656" y="3794760"/>
+            <a:ext cx="2194560" cy="365760"/>
+          </a:xfrm>
+          <a:prstGeom prst="rect">
+            <a:avLst/>
+          </a:prstGeom>
+          <a:noFill/>
+          <a:ln/>
+        </p:spPr>
+        <p:txBody>
+          <a:bodyPr wrap="square" rtlCol="0" anchor="t"/>
+          <a:lstStyle/>
+          <a:p>
+            <a:pPr indent="0" marL="0">
+              <a:buNone/>
+            </a:pPr>
+            <a:r>
+              <a:rPr lang="en-US" sz="1700" b="1" dirty="0">
+                <a:solidFill>
+                  <a:srgbClr val="1A1A1A"/>
+                </a:solidFill>
+                <a:latin typeface="Calibri" pitchFamily="34" charset="0"/>
+                <a:ea typeface="Calibri" pitchFamily="34" charset="-122"/>
+                <a:cs typeface="Calibri" pitchFamily="34" charset="-120"/>
+              </a:rPr>
+              <a:t>Hold mic &amp; speak</a:t>
+            </a:r>
+            <a:endParaRPr lang="en-US" sz="1700" dirty="0"/>
+          </a:p>
+        </p:txBody>
+      </p:sp>
+      <p:sp>
+        <p:nvSpPr>
+          <p:cNvPr id="23" name="Text 21"/>
+          <p:cNvSpPr/>
+          <p:nvPr/>
+        </p:nvSpPr>
+        <p:spPr>
+          <a:xfrm>
+            <a:off x="6391656" y="4206240"/>
+            <a:ext cx="2194560" cy="1234440"/>
+          </a:xfrm>
+          <a:prstGeom prst="rect">
+            <a:avLst/>
+          </a:prstGeom>
+          <a:noFill/>
+          <a:ln/>
+        </p:spPr>
+        <p:txBody>
+          <a:bodyPr wrap="square" rtlCol="0" anchor="t"/>
+          <a:lstStyle/>
+          <a:p>
+            <a:pPr indent="0" marL="0">
+              <a:buNone/>
+            </a:pPr>
+            <a:r>
+              <a:rPr lang="en-US" sz="1300" dirty="0">
+                <a:solidFill>
+                  <a:srgbClr val="6B6B70"/>
+                </a:solidFill>
+                <a:latin typeface="Calibri" pitchFamily="34" charset="0"/>
+                <a:ea typeface="Calibri" pitchFamily="34" charset="-122"/>
+                <a:cs typeface="Calibri" pitchFamily="34" charset="-120"/>
+              </a:rPr>
+              <a:t>“Round 1, time 10:30, chlorine zero, turbidity 0.18, pH 6.8, TDS 410.” Or click a “Try” phrase.</a:t>
+            </a:r>
+            <a:endParaRPr lang="en-US" sz="1300" dirty="0"/>
+          </a:p>
+        </p:txBody>
+      </p:sp>
+      <p:sp>
+        <p:nvSpPr>
+          <p:cNvPr id="24" name="Shape 22"/>
+          <p:cNvSpPr/>
+          <p:nvPr/>
+        </p:nvSpPr>
+        <p:spPr>
+          <a:xfrm>
+            <a:off x="8970264" y="3063240"/>
+            <a:ext cx="2651760" cy="2514600"/>
+          </a:xfrm>
+          <a:prstGeom prst="roundRect">
+            <a:avLst>
+              <a:gd name="adj" fmla="val 4364"/>
+            </a:avLst>
+          </a:prstGeom>
+          <a:solidFill>
+            <a:srgbClr val="F7F7F8"/>
+          </a:solidFill>
+          <a:ln w="12700">
+            <a:solidFill>
+              <a:srgbClr val="E6E6E9"/>
+            </a:solidFill>
+            <a:prstDash val="solid"/>
+          </a:ln>
+        </p:spPr>
+      </p:sp>
+      <p:sp>
+        <p:nvSpPr>
+          <p:cNvPr id="25" name="Shape 23"/>
+          <p:cNvSpPr/>
+          <p:nvPr/>
+        </p:nvSpPr>
+        <p:spPr>
+          <a:xfrm>
+            <a:off x="9198864" y="3291840"/>
+            <a:ext cx="384048" cy="384048"/>
+          </a:xfrm>
+          <a:prstGeom prst="ellipse">
+            <a:avLst/>
+          </a:prstGeom>
+          <a:solidFill>
+            <a:srgbClr val="E0362C"/>
+          </a:solidFill>
+          <a:ln w="12700">
+            <a:solidFill>
+              <a:srgbClr val="E0362C"/>
+            </a:solidFill>
+            <a:prstDash val="solid"/>
+          </a:ln>
+        </p:spPr>
+      </p:sp>
+      <p:sp>
+        <p:nvSpPr>
+          <p:cNvPr id="26" name="Text 24"/>
+          <p:cNvSpPr/>
+          <p:nvPr/>
+        </p:nvSpPr>
+        <p:spPr>
+          <a:xfrm>
+            <a:off x="9198864" y="3291840"/>
+            <a:ext cx="384048" cy="384048"/>
+          </a:xfrm>
+          <a:prstGeom prst="rect">
+            <a:avLst/>
+          </a:prstGeom>
+          <a:noFill/>
+          <a:ln/>
+        </p:spPr>
+        <p:txBody>
+          <a:bodyPr wrap="square" rtlCol="0" anchor="ctr"/>
+          <a:lstStyle/>
+          <a:p>
+            <a:pPr algn="ctr" indent="0" marL="0">
+              <a:buNone/>
+            </a:pPr>
+            <a:r>
+              <a:rPr lang="en-US" sz="1400" b="1" dirty="0">
+                <a:solidFill>
+                  <a:srgbClr val="FFFFFF"/>
+                </a:solidFill>
+                <a:latin typeface="Calibri" pitchFamily="34" charset="0"/>
+                <a:ea typeface="Calibri" pitchFamily="34" charset="-122"/>
+                <a:cs typeface="Calibri" pitchFamily="34" charset="-120"/>
+              </a:rPr>
+              <a:t>4</a:t>
+            </a:r>
+            <a:endParaRPr lang="en-US" sz="1400" dirty="0"/>
+          </a:p>
+        </p:txBody>
+      </p:sp>
+      <p:sp>
+        <p:nvSpPr>
+          <p:cNvPr id="27" name="Text 25"/>
+          <p:cNvSpPr/>
+          <p:nvPr/>
+        </p:nvSpPr>
+        <p:spPr>
+          <a:xfrm>
+            <a:off x="9198864" y="3794760"/>
+            <a:ext cx="2194560" cy="365760"/>
+          </a:xfrm>
+          <a:prstGeom prst="rect">
+            <a:avLst/>
+          </a:prstGeom>
+          <a:noFill/>
+          <a:ln/>
+        </p:spPr>
+        <p:txBody>
+          <a:bodyPr wrap="square" rtlCol="0" anchor="t"/>
+          <a:lstStyle/>
+          <a:p>
+            <a:pPr indent="0" marL="0">
+              <a:buNone/>
+            </a:pPr>
+            <a:r>
+              <a:rPr lang="en-US" sz="1700" b="1" dirty="0">
+                <a:solidFill>
+                  <a:srgbClr val="1A1A1A"/>
+                </a:solidFill>
+                <a:latin typeface="Calibri" pitchFamily="34" charset="0"/>
+                <a:ea typeface="Calibri" pitchFamily="34" charset="-122"/>
+                <a:cs typeface="Calibri" pitchFamily="34" charset="-120"/>
+              </a:rPr>
+              <a:t>Review and accept</a:t>
+            </a:r>
+            <a:endParaRPr lang="en-US" sz="1700" dirty="0"/>
+          </a:p>
+        </p:txBody>
+      </p:sp>
+      <p:sp>
+        <p:nvSpPr>
+          <p:cNvPr id="28" name="Text 26"/>
+          <p:cNvSpPr/>
+          <p:nvPr/>
+        </p:nvSpPr>
+        <p:spPr>
+          <a:xfrm>
+            <a:off x="9198864" y="4206240"/>
+            <a:ext cx="2194560" cy="1234440"/>
+          </a:xfrm>
+          <a:prstGeom prst="rect">
+            <a:avLst/>
+          </a:prstGeom>
+          <a:noFill/>
+          <a:ln/>
+        </p:spPr>
+        <p:txBody>
+          <a:bodyPr wrap="square" rtlCol="0" anchor="t"/>
+          <a:lstStyle/>
+          <a:p>
+            <a:pPr indent="0" marL="0">
+              <a:buNone/>
+            </a:pPr>
+            <a:r>
+              <a:rPr lang="en-US" sz="1300" dirty="0">
+                <a:solidFill>
+                  <a:srgbClr val="6B6B70"/>
+                </a:solidFill>
+                <a:latin typeface="Calibri" pitchFamily="34" charset="0"/>
+                <a:ea typeface="Calibri" pitchFamily="34" charset="-122"/>
+                <a:cs typeface="Calibri" pitchFamily="34" charset="-120"/>
+              </a:rPr>
+              <a:t>Tick the values that are right. They fill the form with a mic badge; check the Voice capture log.</a:t>
+            </a:r>
+            <a:endParaRPr lang="en-US" sz="1300" dirty="0"/>
+          </a:p>
+        </p:txBody>
+      </p:sp>
+      <p:sp>
+        <p:nvSpPr>
+          <p:cNvPr id="29" name="Text 27"/>
+          <p:cNvSpPr/>
+          <p:nvPr/>
+        </p:nvSpPr>
+        <p:spPr>
+          <a:xfrm>
+            <a:off x="548640" y="5760720"/>
+            <a:ext cx="11064240" cy="411480"/>
+          </a:xfrm>
+          <a:prstGeom prst="rect">
+            <a:avLst/>
+          </a:prstGeom>
+          <a:noFill/>
+          <a:ln/>
+        </p:spPr>
+        <p:txBody>
+          <a:bodyPr wrap="square" rtlCol="0" anchor="ctr"/>
+          <a:lstStyle/>
+          <a:p>
+            <a:pPr indent="0" marL="0">
+              <a:buNone/>
+            </a:pPr>
+            <a:r>
+              <a:rPr lang="en-US" sz="1300" i="1" dirty="0">
+                <a:solidFill>
+                  <a:srgbClr val="6B6B70"/>
+                </a:solidFill>
+                <a:latin typeface="Calibri" pitchFamily="34" charset="0"/>
+                <a:ea typeface="Calibri" pitchFamily="34" charset="-122"/>
+                <a:cs typeface="Calibri" pitchFamily="34" charset="-120"/>
+              </a:rPr>
+              <a:t>Each visitor gets a private sandbox: entries stay in their own browser and are never shared. “Reset demo” clears them.</a:t>
+            </a:r>
+            <a:endParaRPr lang="en-US" sz="1300" dirty="0"/>
+          </a:p>
+        </p:txBody>
+      </p:sp>
+    </p:spTree>
+  </p:cSld>
+  <p:clrMapOvr>
+    <a:masterClrMapping/>
+  </p:clrMapOvr>
+</p:sld>
+</file>
+
 <file path=ppt/slides/slide2.xml><?xml version="1.0" encoding="utf-8"?>
 <p:sld xmlns:a="http://schemas.openxmlformats.org/drawingml/2006/main" xmlns:r="http://schemas.openxmlformats.org/officeDocument/2006/relationships" xmlns:p="http://schemas.openxmlformats.org/presentationml/2006/main">
   <p:cSld name="Slide 2">
